--- a/assets/downloads/Session-3-Keeping-Young-People-Safe-Online.pptx
+++ b/assets/downloads/Session-3-Keeping-Young-People-Safe-Online.pptx
@@ -9914,7 +9914,7 @@
               </a:defRPr>
             </a:pPr>
             <a:r>
-              <a:t>"What is harm in a digital space — and who is responsible for preventing it?"</a:t>
+              <a:t>"What is harm in digital spaces — and where does it show up, online and in-person?"</a:t>
             </a:r>
           </a:p>
         </p:txBody>
@@ -9950,7 +9950,7 @@
               </a:defRPr>
             </a:pPr>
             <a:r>
-              <a:t>Harm online doesn't always look like harm in a room. Sometimes it's invisible. Sometimes the thing designed to keep people safe actually makes things worse. This session is about seeing the whole picture — and choosing where you intervene.</a:t>
+              <a:t>Harm online doesn't always look like harm in a room. Sometimes it's invisible. Sometimes it starts online and lands in the room. Sometimes the thing designed to keep people safe actually makes things worse. This session is about seeing where harm shows up across both — and choosing where you intervene.</a:t>
             </a:r>
           </a:p>
         </p:txBody>

--- a/assets/downloads/Session-3-Keeping-Young-People-Safe-Online.pptx
+++ b/assets/downloads/Session-3-Keeping-Young-People-Safe-Online.pptx
@@ -5,40 +5,40 @@
     <p:sldMasterId id="2147483648" r:id="rId1"/>
   </p:sldMasterIdLst>
   <p:sldIdLst>
-    <p:sldId id="256" r:id="rId7"/>
-    <p:sldId id="257" r:id="rId8"/>
-    <p:sldId id="258" r:id="rId9"/>
-    <p:sldId id="259" r:id="rId10"/>
-    <p:sldId id="260" r:id="rId11"/>
-    <p:sldId id="261" r:id="rId12"/>
-    <p:sldId id="262" r:id="rId13"/>
-    <p:sldId id="263" r:id="rId14"/>
-    <p:sldId id="264" r:id="rId15"/>
-    <p:sldId id="265" r:id="rId16"/>
-    <p:sldId id="266" r:id="rId17"/>
-    <p:sldId id="267" r:id="rId18"/>
-    <p:sldId id="268" r:id="rId19"/>
-    <p:sldId id="269" r:id="rId20"/>
-    <p:sldId id="270" r:id="rId21"/>
-    <p:sldId id="271" r:id="rId22"/>
-    <p:sldId id="272" r:id="rId23"/>
-    <p:sldId id="273" r:id="rId24"/>
-    <p:sldId id="274" r:id="rId25"/>
-    <p:sldId id="275" r:id="rId26"/>
-    <p:sldId id="276" r:id="rId27"/>
-    <p:sldId id="277" r:id="rId28"/>
-    <p:sldId id="278" r:id="rId29"/>
-    <p:sldId id="279" r:id="rId30"/>
-    <p:sldId id="280" r:id="rId31"/>
-    <p:sldId id="281" r:id="rId32"/>
-    <p:sldId id="282" r:id="rId33"/>
-    <p:sldId id="283" r:id="rId34"/>
-    <p:sldId id="284" r:id="rId35"/>
-    <p:sldId id="285" r:id="rId36"/>
-    <p:sldId id="286" r:id="rId37"/>
-    <p:sldId id="287" r:id="rId38"/>
+    <p:sldId id="256" r:id="rId2"/>
+    <p:sldId id="257" r:id="rId3"/>
+    <p:sldId id="258" r:id="rId4"/>
+    <p:sldId id="259" r:id="rId5"/>
+    <p:sldId id="260" r:id="rId6"/>
+    <p:sldId id="261" r:id="rId7"/>
+    <p:sldId id="262" r:id="rId8"/>
+    <p:sldId id="263" r:id="rId9"/>
+    <p:sldId id="264" r:id="rId10"/>
+    <p:sldId id="265" r:id="rId11"/>
+    <p:sldId id="266" r:id="rId12"/>
+    <p:sldId id="267" r:id="rId13"/>
+    <p:sldId id="268" r:id="rId14"/>
+    <p:sldId id="269" r:id="rId15"/>
+    <p:sldId id="270" r:id="rId16"/>
+    <p:sldId id="271" r:id="rId17"/>
+    <p:sldId id="272" r:id="rId18"/>
+    <p:sldId id="273" r:id="rId19"/>
+    <p:sldId id="274" r:id="rId20"/>
+    <p:sldId id="275" r:id="rId21"/>
+    <p:sldId id="276" r:id="rId22"/>
+    <p:sldId id="277" r:id="rId23"/>
+    <p:sldId id="278" r:id="rId24"/>
+    <p:sldId id="279" r:id="rId25"/>
+    <p:sldId id="280" r:id="rId26"/>
+    <p:sldId id="281" r:id="rId27"/>
+    <p:sldId id="282" r:id="rId28"/>
+    <p:sldId id="283" r:id="rId29"/>
+    <p:sldId id="284" r:id="rId30"/>
+    <p:sldId id="285" r:id="rId31"/>
+    <p:sldId id="286" r:id="rId32"/>
+    <p:sldId id="287" r:id="rId33"/>
   </p:sldIdLst>
-  <p:sldSz cx="12191695" cy="6858000" type="screen4x3"/>
+  <p:sldSz cx="12192000" cy="6858000"/>
   <p:notesSz cx="6858000" cy="9144000"/>
   <p:defaultTextStyle>
     <a:defPPr>
@@ -135,6 +135,22 @@
       </a:defRPr>
     </a:lvl9pPr>
   </p:defaultTextStyle>
+  <p:extLst>
+    <p:ext uri="{EFAFB233-063F-42B5-8137-9DF3F51BA10A}">
+      <p15:sldGuideLst xmlns:p15="http://schemas.microsoft.com/office/powerpoint/2012/main">
+        <p15:guide id="1" orient="horz" pos="2160">
+          <p15:clr>
+            <a:srgbClr val="A4A3A4"/>
+          </p15:clr>
+        </p15:guide>
+        <p15:guide id="2" pos="2880">
+          <p15:clr>
+            <a:srgbClr val="A4A3A4"/>
+          </p15:clr>
+        </p15:guide>
+      </p15:sldGuideLst>
+    </p:ext>
+  </p:extLst>
 </p:presentation>
 </file>
 
@@ -176,10 +192,9 @@
           <a:lstStyle/>
           <a:p>
             <a:r>
-              <a:rPr lang="en-US" smtClean="0"/>
+              <a:rPr lang="en-US"/>
               <a:t>Click to edit Master title style</a:t>
             </a:r>
-            <a:endParaRPr lang="en-US"/>
           </a:p>
         </p:txBody>
       </p:sp>
@@ -295,10 +310,9 @@
           </a:lstStyle>
           <a:p>
             <a:r>
-              <a:rPr lang="en-US" smtClean="0"/>
+              <a:rPr lang="en-US"/>
               <a:t>Click to edit Master subtitle style</a:t>
             </a:r>
-            <a:endParaRPr lang="en-US"/>
           </a:p>
         </p:txBody>
       </p:sp>
@@ -319,7 +333,7 @@
           <a:p>
             <a:fld id="{5BCAD085-E8A6-8845-BD4E-CB4CCA059FC4}" type="datetimeFigureOut">
               <a:rPr lang="en-US" smtClean="0"/>
-              <a:t>1/27/13</a:t>
+              <a:t>4/16/26</a:t>
             </a:fld>
             <a:endParaRPr lang="en-US"/>
           </a:p>
@@ -413,10 +427,9 @@
           <a:lstStyle/>
           <a:p>
             <a:r>
-              <a:rPr lang="en-US" smtClean="0"/>
+              <a:rPr lang="en-US"/>
               <a:t>Click to edit Master title style</a:t>
             </a:r>
-            <a:endParaRPr lang="en-US"/>
           </a:p>
         </p:txBody>
       </p:sp>
@@ -437,38 +450,37 @@
           <a:p>
             <a:pPr lvl="0"/>
             <a:r>
-              <a:rPr lang="en-US" smtClean="0"/>
+              <a:rPr lang="en-US"/>
               <a:t>Click to edit Master text styles</a:t>
             </a:r>
           </a:p>
           <a:p>
             <a:pPr lvl="1"/>
             <a:r>
-              <a:rPr lang="en-US" smtClean="0"/>
+              <a:rPr lang="en-US"/>
               <a:t>Second level</a:t>
             </a:r>
           </a:p>
           <a:p>
             <a:pPr lvl="2"/>
             <a:r>
-              <a:rPr lang="en-US" smtClean="0"/>
+              <a:rPr lang="en-US"/>
               <a:t>Third level</a:t>
             </a:r>
           </a:p>
           <a:p>
             <a:pPr lvl="3"/>
             <a:r>
-              <a:rPr lang="en-US" smtClean="0"/>
+              <a:rPr lang="en-US"/>
               <a:t>Fourth level</a:t>
             </a:r>
           </a:p>
           <a:p>
             <a:pPr lvl="4"/>
             <a:r>
-              <a:rPr lang="en-US" smtClean="0"/>
+              <a:rPr lang="en-US"/>
               <a:t>Fifth level</a:t>
             </a:r>
-            <a:endParaRPr lang="en-US"/>
           </a:p>
         </p:txBody>
       </p:sp>
@@ -489,7 +501,7 @@
           <a:p>
             <a:fld id="{5BCAD085-E8A6-8845-BD4E-CB4CCA059FC4}" type="datetimeFigureOut">
               <a:rPr lang="en-US" smtClean="0"/>
-              <a:t>1/27/13</a:t>
+              <a:t>4/16/26</a:t>
             </a:fld>
             <a:endParaRPr lang="en-US"/>
           </a:p>
@@ -588,10 +600,9 @@
           <a:lstStyle/>
           <a:p>
             <a:r>
-              <a:rPr lang="en-US" smtClean="0"/>
+              <a:rPr lang="en-US"/>
               <a:t>Click to edit Master title style</a:t>
             </a:r>
-            <a:endParaRPr lang="en-US"/>
           </a:p>
         </p:txBody>
       </p:sp>
@@ -617,38 +628,37 @@
           <a:p>
             <a:pPr lvl="0"/>
             <a:r>
-              <a:rPr lang="en-US" smtClean="0"/>
+              <a:rPr lang="en-US"/>
               <a:t>Click to edit Master text styles</a:t>
             </a:r>
           </a:p>
           <a:p>
             <a:pPr lvl="1"/>
             <a:r>
-              <a:rPr lang="en-US" smtClean="0"/>
+              <a:rPr lang="en-US"/>
               <a:t>Second level</a:t>
             </a:r>
           </a:p>
           <a:p>
             <a:pPr lvl="2"/>
             <a:r>
-              <a:rPr lang="en-US" smtClean="0"/>
+              <a:rPr lang="en-US"/>
               <a:t>Third level</a:t>
             </a:r>
           </a:p>
           <a:p>
             <a:pPr lvl="3"/>
             <a:r>
-              <a:rPr lang="en-US" smtClean="0"/>
+              <a:rPr lang="en-US"/>
               <a:t>Fourth level</a:t>
             </a:r>
           </a:p>
           <a:p>
             <a:pPr lvl="4"/>
             <a:r>
-              <a:rPr lang="en-US" smtClean="0"/>
+              <a:rPr lang="en-US"/>
               <a:t>Fifth level</a:t>
             </a:r>
-            <a:endParaRPr lang="en-US"/>
           </a:p>
         </p:txBody>
       </p:sp>
@@ -669,7 +679,7 @@
           <a:p>
             <a:fld id="{5BCAD085-E8A6-8845-BD4E-CB4CCA059FC4}" type="datetimeFigureOut">
               <a:rPr lang="en-US" smtClean="0"/>
-              <a:t>1/27/13</a:t>
+              <a:t>4/16/26</a:t>
             </a:fld>
             <a:endParaRPr lang="en-US"/>
           </a:p>
@@ -763,10 +773,9 @@
           <a:lstStyle/>
           <a:p>
             <a:r>
-              <a:rPr lang="en-US" smtClean="0"/>
+              <a:rPr lang="en-US"/>
               <a:t>Click to edit Master title style</a:t>
             </a:r>
-            <a:endParaRPr lang="en-US"/>
           </a:p>
         </p:txBody>
       </p:sp>
@@ -787,38 +796,37 @@
           <a:p>
             <a:pPr lvl="0"/>
             <a:r>
-              <a:rPr lang="en-US" smtClean="0"/>
+              <a:rPr lang="en-US"/>
               <a:t>Click to edit Master text styles</a:t>
             </a:r>
           </a:p>
           <a:p>
             <a:pPr lvl="1"/>
             <a:r>
-              <a:rPr lang="en-US" smtClean="0"/>
+              <a:rPr lang="en-US"/>
               <a:t>Second level</a:t>
             </a:r>
           </a:p>
           <a:p>
             <a:pPr lvl="2"/>
             <a:r>
-              <a:rPr lang="en-US" smtClean="0"/>
+              <a:rPr lang="en-US"/>
               <a:t>Third level</a:t>
             </a:r>
           </a:p>
           <a:p>
             <a:pPr lvl="3"/>
             <a:r>
-              <a:rPr lang="en-US" smtClean="0"/>
+              <a:rPr lang="en-US"/>
               <a:t>Fourth level</a:t>
             </a:r>
           </a:p>
           <a:p>
             <a:pPr lvl="4"/>
             <a:r>
-              <a:rPr lang="en-US" smtClean="0"/>
+              <a:rPr lang="en-US"/>
               <a:t>Fifth level</a:t>
             </a:r>
-            <a:endParaRPr lang="en-US"/>
           </a:p>
         </p:txBody>
       </p:sp>
@@ -839,7 +847,7 @@
           <a:p>
             <a:fld id="{5BCAD085-E8A6-8845-BD4E-CB4CCA059FC4}" type="datetimeFigureOut">
               <a:rPr lang="en-US" smtClean="0"/>
-              <a:t>1/27/13</a:t>
+              <a:t>4/16/26</a:t>
             </a:fld>
             <a:endParaRPr lang="en-US"/>
           </a:p>
@@ -942,10 +950,9 @@
           </a:lstStyle>
           <a:p>
             <a:r>
-              <a:rPr lang="en-US" smtClean="0"/>
+              <a:rPr lang="en-US"/>
               <a:t>Click to edit Master title style</a:t>
             </a:r>
-            <a:endParaRPr lang="en-US"/>
           </a:p>
         </p:txBody>
       </p:sp>
@@ -1062,7 +1069,7 @@
           <a:p>
             <a:pPr lvl="0"/>
             <a:r>
-              <a:rPr lang="en-US" smtClean="0"/>
+              <a:rPr lang="en-US"/>
               <a:t>Click to edit Master text styles</a:t>
             </a:r>
           </a:p>
@@ -1085,7 +1092,7 @@
           <a:p>
             <a:fld id="{5BCAD085-E8A6-8845-BD4E-CB4CCA059FC4}" type="datetimeFigureOut">
               <a:rPr lang="en-US" smtClean="0"/>
-              <a:t>1/27/13</a:t>
+              <a:t>4/16/26</a:t>
             </a:fld>
             <a:endParaRPr lang="en-US"/>
           </a:p>
@@ -1179,10 +1186,9 @@
           <a:lstStyle/>
           <a:p>
             <a:r>
-              <a:rPr lang="en-US" smtClean="0"/>
+              <a:rPr lang="en-US"/>
               <a:t>Click to edit Master title style</a:t>
             </a:r>
-            <a:endParaRPr lang="en-US"/>
           </a:p>
         </p:txBody>
       </p:sp>
@@ -1236,38 +1242,37 @@
           <a:p>
             <a:pPr lvl="0"/>
             <a:r>
-              <a:rPr lang="en-US" smtClean="0"/>
+              <a:rPr lang="en-US"/>
               <a:t>Click to edit Master text styles</a:t>
             </a:r>
           </a:p>
           <a:p>
             <a:pPr lvl="1"/>
             <a:r>
-              <a:rPr lang="en-US" smtClean="0"/>
+              <a:rPr lang="en-US"/>
               <a:t>Second level</a:t>
             </a:r>
           </a:p>
           <a:p>
             <a:pPr lvl="2"/>
             <a:r>
-              <a:rPr lang="en-US" smtClean="0"/>
+              <a:rPr lang="en-US"/>
               <a:t>Third level</a:t>
             </a:r>
           </a:p>
           <a:p>
             <a:pPr lvl="3"/>
             <a:r>
-              <a:rPr lang="en-US" smtClean="0"/>
+              <a:rPr lang="en-US"/>
               <a:t>Fourth level</a:t>
             </a:r>
           </a:p>
           <a:p>
             <a:pPr lvl="4"/>
             <a:r>
-              <a:rPr lang="en-US" smtClean="0"/>
+              <a:rPr lang="en-US"/>
               <a:t>Fifth level</a:t>
             </a:r>
-            <a:endParaRPr lang="en-US"/>
           </a:p>
         </p:txBody>
       </p:sp>
@@ -1321,38 +1326,37 @@
           <a:p>
             <a:pPr lvl="0"/>
             <a:r>
-              <a:rPr lang="en-US" smtClean="0"/>
+              <a:rPr lang="en-US"/>
               <a:t>Click to edit Master text styles</a:t>
             </a:r>
           </a:p>
           <a:p>
             <a:pPr lvl="1"/>
             <a:r>
-              <a:rPr lang="en-US" smtClean="0"/>
+              <a:rPr lang="en-US"/>
               <a:t>Second level</a:t>
             </a:r>
           </a:p>
           <a:p>
             <a:pPr lvl="2"/>
             <a:r>
-              <a:rPr lang="en-US" smtClean="0"/>
+              <a:rPr lang="en-US"/>
               <a:t>Third level</a:t>
             </a:r>
           </a:p>
           <a:p>
             <a:pPr lvl="3"/>
             <a:r>
-              <a:rPr lang="en-US" smtClean="0"/>
+              <a:rPr lang="en-US"/>
               <a:t>Fourth level</a:t>
             </a:r>
           </a:p>
           <a:p>
             <a:pPr lvl="4"/>
             <a:r>
-              <a:rPr lang="en-US" smtClean="0"/>
+              <a:rPr lang="en-US"/>
               <a:t>Fifth level</a:t>
             </a:r>
-            <a:endParaRPr lang="en-US"/>
           </a:p>
         </p:txBody>
       </p:sp>
@@ -1373,7 +1377,7 @@
           <a:p>
             <a:fld id="{5BCAD085-E8A6-8845-BD4E-CB4CCA059FC4}" type="datetimeFigureOut">
               <a:rPr lang="en-US" smtClean="0"/>
-              <a:t>1/27/13</a:t>
+              <a:t>4/16/26</a:t>
             </a:fld>
             <a:endParaRPr lang="en-US"/>
           </a:p>
@@ -1471,10 +1475,9 @@
           </a:lstStyle>
           <a:p>
             <a:r>
-              <a:rPr lang="en-US" smtClean="0"/>
+              <a:rPr lang="en-US"/>
               <a:t>Click to edit Master title style</a:t>
             </a:r>
-            <a:endParaRPr lang="en-US"/>
           </a:p>
         </p:txBody>
       </p:sp>
@@ -1537,7 +1540,7 @@
           <a:p>
             <a:pPr lvl="0"/>
             <a:r>
-              <a:rPr lang="en-US" smtClean="0"/>
+              <a:rPr lang="en-US"/>
               <a:t>Click to edit Master text styles</a:t>
             </a:r>
           </a:p>
@@ -1593,38 +1596,37 @@
           <a:p>
             <a:pPr lvl="0"/>
             <a:r>
-              <a:rPr lang="en-US" smtClean="0"/>
+              <a:rPr lang="en-US"/>
               <a:t>Click to edit Master text styles</a:t>
             </a:r>
           </a:p>
           <a:p>
             <a:pPr lvl="1"/>
             <a:r>
-              <a:rPr lang="en-US" smtClean="0"/>
+              <a:rPr lang="en-US"/>
               <a:t>Second level</a:t>
             </a:r>
           </a:p>
           <a:p>
             <a:pPr lvl="2"/>
             <a:r>
-              <a:rPr lang="en-US" smtClean="0"/>
+              <a:rPr lang="en-US"/>
               <a:t>Third level</a:t>
             </a:r>
           </a:p>
           <a:p>
             <a:pPr lvl="3"/>
             <a:r>
-              <a:rPr lang="en-US" smtClean="0"/>
+              <a:rPr lang="en-US"/>
               <a:t>Fourth level</a:t>
             </a:r>
           </a:p>
           <a:p>
             <a:pPr lvl="4"/>
             <a:r>
-              <a:rPr lang="en-US" smtClean="0"/>
+              <a:rPr lang="en-US"/>
               <a:t>Fifth level</a:t>
             </a:r>
-            <a:endParaRPr lang="en-US"/>
           </a:p>
         </p:txBody>
       </p:sp>
@@ -1687,7 +1689,7 @@
           <a:p>
             <a:pPr lvl="0"/>
             <a:r>
-              <a:rPr lang="en-US" smtClean="0"/>
+              <a:rPr lang="en-US"/>
               <a:t>Click to edit Master text styles</a:t>
             </a:r>
           </a:p>
@@ -1743,38 +1745,37 @@
           <a:p>
             <a:pPr lvl="0"/>
             <a:r>
-              <a:rPr lang="en-US" smtClean="0"/>
+              <a:rPr lang="en-US"/>
               <a:t>Click to edit Master text styles</a:t>
             </a:r>
           </a:p>
           <a:p>
             <a:pPr lvl="1"/>
             <a:r>
-              <a:rPr lang="en-US" smtClean="0"/>
+              <a:rPr lang="en-US"/>
               <a:t>Second level</a:t>
             </a:r>
           </a:p>
           <a:p>
             <a:pPr lvl="2"/>
             <a:r>
-              <a:rPr lang="en-US" smtClean="0"/>
+              <a:rPr lang="en-US"/>
               <a:t>Third level</a:t>
             </a:r>
           </a:p>
           <a:p>
             <a:pPr lvl="3"/>
             <a:r>
-              <a:rPr lang="en-US" smtClean="0"/>
+              <a:rPr lang="en-US"/>
               <a:t>Fourth level</a:t>
             </a:r>
           </a:p>
           <a:p>
             <a:pPr lvl="4"/>
             <a:r>
-              <a:rPr lang="en-US" smtClean="0"/>
+              <a:rPr lang="en-US"/>
               <a:t>Fifth level</a:t>
             </a:r>
-            <a:endParaRPr lang="en-US"/>
           </a:p>
         </p:txBody>
       </p:sp>
@@ -1795,7 +1796,7 @@
           <a:p>
             <a:fld id="{5BCAD085-E8A6-8845-BD4E-CB4CCA059FC4}" type="datetimeFigureOut">
               <a:rPr lang="en-US" smtClean="0"/>
-              <a:t>1/27/13</a:t>
+              <a:t>4/16/26</a:t>
             </a:fld>
             <a:endParaRPr lang="en-US"/>
           </a:p>
@@ -1889,10 +1890,9 @@
           <a:lstStyle/>
           <a:p>
             <a:r>
-              <a:rPr lang="en-US" smtClean="0"/>
+              <a:rPr lang="en-US"/>
               <a:t>Click to edit Master title style</a:t>
             </a:r>
-            <a:endParaRPr lang="en-US"/>
           </a:p>
         </p:txBody>
       </p:sp>
@@ -1913,7 +1913,7 @@
           <a:p>
             <a:fld id="{5BCAD085-E8A6-8845-BD4E-CB4CCA059FC4}" type="datetimeFigureOut">
               <a:rPr lang="en-US" smtClean="0"/>
-              <a:t>1/27/13</a:t>
+              <a:t>4/16/26</a:t>
             </a:fld>
             <a:endParaRPr lang="en-US"/>
           </a:p>
@@ -2008,7 +2008,7 @@
           <a:p>
             <a:fld id="{5BCAD085-E8A6-8845-BD4E-CB4CCA059FC4}" type="datetimeFigureOut">
               <a:rPr lang="en-US" smtClean="0"/>
-              <a:t>1/27/13</a:t>
+              <a:t>4/16/26</a:t>
             </a:fld>
             <a:endParaRPr lang="en-US"/>
           </a:p>
@@ -2111,10 +2111,9 @@
           </a:lstStyle>
           <a:p>
             <a:r>
-              <a:rPr lang="en-US" smtClean="0"/>
+              <a:rPr lang="en-US"/>
               <a:t>Click to edit Master title style</a:t>
             </a:r>
-            <a:endParaRPr lang="en-US"/>
           </a:p>
         </p:txBody>
       </p:sp>
@@ -2168,38 +2167,37 @@
           <a:p>
             <a:pPr lvl="0"/>
             <a:r>
-              <a:rPr lang="en-US" smtClean="0"/>
+              <a:rPr lang="en-US"/>
               <a:t>Click to edit Master text styles</a:t>
             </a:r>
           </a:p>
           <a:p>
             <a:pPr lvl="1"/>
             <a:r>
-              <a:rPr lang="en-US" smtClean="0"/>
+              <a:rPr lang="en-US"/>
               <a:t>Second level</a:t>
             </a:r>
           </a:p>
           <a:p>
             <a:pPr lvl="2"/>
             <a:r>
-              <a:rPr lang="en-US" smtClean="0"/>
+              <a:rPr lang="en-US"/>
               <a:t>Third level</a:t>
             </a:r>
           </a:p>
           <a:p>
             <a:pPr lvl="3"/>
             <a:r>
-              <a:rPr lang="en-US" smtClean="0"/>
+              <a:rPr lang="en-US"/>
               <a:t>Fourth level</a:t>
             </a:r>
           </a:p>
           <a:p>
             <a:pPr lvl="4"/>
             <a:r>
-              <a:rPr lang="en-US" smtClean="0"/>
+              <a:rPr lang="en-US"/>
               <a:t>Fifth level</a:t>
             </a:r>
-            <a:endParaRPr lang="en-US"/>
           </a:p>
         </p:txBody>
       </p:sp>
@@ -2262,7 +2260,7 @@
           <a:p>
             <a:pPr lvl="0"/>
             <a:r>
-              <a:rPr lang="en-US" smtClean="0"/>
+              <a:rPr lang="en-US"/>
               <a:t>Click to edit Master text styles</a:t>
             </a:r>
           </a:p>
@@ -2285,7 +2283,7 @@
           <a:p>
             <a:fld id="{5BCAD085-E8A6-8845-BD4E-CB4CCA059FC4}" type="datetimeFigureOut">
               <a:rPr lang="en-US" smtClean="0"/>
-              <a:t>1/27/13</a:t>
+              <a:t>4/16/26</a:t>
             </a:fld>
             <a:endParaRPr lang="en-US"/>
           </a:p>
@@ -2388,10 +2386,9 @@
           </a:lstStyle>
           <a:p>
             <a:r>
-              <a:rPr lang="en-US" smtClean="0"/>
+              <a:rPr lang="en-US"/>
               <a:t>Click to edit Master title style</a:t>
             </a:r>
-            <a:endParaRPr lang="en-US"/>
           </a:p>
         </p:txBody>
       </p:sp>
@@ -2515,7 +2512,7 @@
           <a:p>
             <a:pPr lvl="0"/>
             <a:r>
-              <a:rPr lang="en-US" smtClean="0"/>
+              <a:rPr lang="en-US"/>
               <a:t>Click to edit Master text styles</a:t>
             </a:r>
           </a:p>
@@ -2538,7 +2535,7 @@
           <a:p>
             <a:fld id="{5BCAD085-E8A6-8845-BD4E-CB4CCA059FC4}" type="datetimeFigureOut">
               <a:rPr lang="en-US" smtClean="0"/>
-              <a:t>1/27/13</a:t>
+              <a:t>4/16/26</a:t>
             </a:fld>
             <a:endParaRPr lang="en-US"/>
           </a:p>
@@ -2647,10 +2644,9 @@
           <a:lstStyle/>
           <a:p>
             <a:r>
-              <a:rPr lang="en-US" smtClean="0"/>
+              <a:rPr lang="en-US"/>
               <a:t>Click to edit Master title style</a:t>
             </a:r>
-            <a:endParaRPr lang="en-US"/>
           </a:p>
         </p:txBody>
       </p:sp>
@@ -2681,38 +2677,37 @@
           <a:p>
             <a:pPr lvl="0"/>
             <a:r>
-              <a:rPr lang="en-US" smtClean="0"/>
+              <a:rPr lang="en-US"/>
               <a:t>Click to edit Master text styles</a:t>
             </a:r>
           </a:p>
           <a:p>
             <a:pPr lvl="1"/>
             <a:r>
-              <a:rPr lang="en-US" smtClean="0"/>
+              <a:rPr lang="en-US"/>
               <a:t>Second level</a:t>
             </a:r>
           </a:p>
           <a:p>
             <a:pPr lvl="2"/>
             <a:r>
-              <a:rPr lang="en-US" smtClean="0"/>
+              <a:rPr lang="en-US"/>
               <a:t>Third level</a:t>
             </a:r>
           </a:p>
           <a:p>
             <a:pPr lvl="3"/>
             <a:r>
-              <a:rPr lang="en-US" smtClean="0"/>
+              <a:rPr lang="en-US"/>
               <a:t>Fourth level</a:t>
             </a:r>
           </a:p>
           <a:p>
             <a:pPr lvl="4"/>
             <a:r>
-              <a:rPr lang="en-US" smtClean="0"/>
+              <a:rPr lang="en-US"/>
               <a:t>Fifth level</a:t>
             </a:r>
-            <a:endParaRPr lang="en-US"/>
           </a:p>
         </p:txBody>
       </p:sp>
@@ -2751,7 +2746,7 @@
           <a:p>
             <a:fld id="{5BCAD085-E8A6-8845-BD4E-CB4CCA059FC4}" type="datetimeFigureOut">
               <a:rPr lang="en-US" smtClean="0"/>
-              <a:t>1/27/13</a:t>
+              <a:t>4/16/26</a:t>
             </a:fld>
             <a:endParaRPr lang="en-US"/>
           </a:p>
@@ -3110,7 +3105,7 @@
 </file>
 
 <file path=ppt/slides/slide1.xml><?xml version="1.0" encoding="utf-8"?>
-<p:sld xmlns:a="http://schemas.openxmlformats.org/drawingml/2006/main" xmlns:p="http://schemas.openxmlformats.org/presentationml/2006/main" xmlns:r="http://schemas.openxmlformats.org/officeDocument/2006/relationships">
+<p:sld xmlns:a="http://schemas.openxmlformats.org/drawingml/2006/main" xmlns:r="http://schemas.openxmlformats.org/officeDocument/2006/relationships" xmlns:p="http://schemas.openxmlformats.org/presentationml/2006/main">
   <p:cSld>
     <p:bg>
       <p:bgPr>
@@ -3126,7 +3121,14 @@
         <p:cNvGrpSpPr/>
         <p:nvPr/>
       </p:nvGrpSpPr>
-      <p:grpSpPr/>
+      <p:grpSpPr>
+        <a:xfrm>
+          <a:off x="0" y="0"/>
+          <a:ext cx="0" cy="0"/>
+          <a:chOff x="0" y="0"/>
+          <a:chExt cx="0" cy="0"/>
+        </a:xfrm>
+      </p:grpSpPr>
       <p:sp>
         <p:nvSpPr>
           <p:cNvPr id="2" name="Rectangle 1"/>
@@ -3167,6 +3169,7 @@
           <a:lstStyle/>
           <a:p>
             <a:pPr algn="ctr"/>
+            <a:endParaRPr/>
           </a:p>
         </p:txBody>
       </p:sp>
@@ -3210,6 +3213,7 @@
           <a:lstStyle/>
           <a:p>
             <a:pPr algn="ctr"/>
+            <a:endParaRPr/>
           </a:p>
         </p:txBody>
       </p:sp>
@@ -3253,6 +3257,7 @@
           <a:lstStyle/>
           <a:p>
             <a:pPr algn="ctr"/>
+            <a:endParaRPr/>
           </a:p>
         </p:txBody>
       </p:sp>
@@ -3296,6 +3301,7 @@
           <a:lstStyle/>
           <a:p>
             <a:pPr algn="ctr"/>
+            <a:endParaRPr/>
           </a:p>
         </p:txBody>
       </p:sp>
@@ -3339,6 +3345,7 @@
           <a:lstStyle/>
           <a:p>
             <a:pPr algn="ctr"/>
+            <a:endParaRPr/>
           </a:p>
         </p:txBody>
       </p:sp>
@@ -3382,6 +3389,7 @@
           <a:lstStyle/>
           <a:p>
             <a:pPr algn="ctr"/>
+            <a:endParaRPr/>
           </a:p>
         </p:txBody>
       </p:sp>
@@ -3586,7 +3594,7 @@
 </file>
 
 <file path=ppt/slides/slide10.xml><?xml version="1.0" encoding="utf-8"?>
-<p:sld xmlns:a="http://schemas.openxmlformats.org/drawingml/2006/main" xmlns:p="http://schemas.openxmlformats.org/presentationml/2006/main" xmlns:r="http://schemas.openxmlformats.org/officeDocument/2006/relationships">
+<p:sld xmlns:a="http://schemas.openxmlformats.org/drawingml/2006/main" xmlns:r="http://schemas.openxmlformats.org/officeDocument/2006/relationships" xmlns:p="http://schemas.openxmlformats.org/presentationml/2006/main">
   <p:cSld>
     <p:bg>
       <p:bgPr>
@@ -3602,7 +3610,14 @@
         <p:cNvGrpSpPr/>
         <p:nvPr/>
       </p:nvGrpSpPr>
-      <p:grpSpPr/>
+      <p:grpSpPr>
+        <a:xfrm>
+          <a:off x="0" y="0"/>
+          <a:ext cx="0" cy="0"/>
+          <a:chOff x="0" y="0"/>
+          <a:chExt cx="0" cy="0"/>
+        </a:xfrm>
+      </p:grpSpPr>
       <p:sp>
         <p:nvSpPr>
           <p:cNvPr id="2" name="Rectangle 1"/>
@@ -3643,6 +3658,7 @@
           <a:lstStyle/>
           <a:p>
             <a:pPr algn="ctr"/>
+            <a:endParaRPr/>
           </a:p>
         </p:txBody>
       </p:sp>
@@ -3859,7 +3875,7 @@
 </file>
 
 <file path=ppt/slides/slide11.xml><?xml version="1.0" encoding="utf-8"?>
-<p:sld xmlns:a="http://schemas.openxmlformats.org/drawingml/2006/main" xmlns:p="http://schemas.openxmlformats.org/presentationml/2006/main" xmlns:r="http://schemas.openxmlformats.org/officeDocument/2006/relationships">
+<p:sld xmlns:a="http://schemas.openxmlformats.org/drawingml/2006/main" xmlns:r="http://schemas.openxmlformats.org/officeDocument/2006/relationships" xmlns:p="http://schemas.openxmlformats.org/presentationml/2006/main">
   <p:cSld>
     <p:bg>
       <p:bgPr>
@@ -3875,7 +3891,14 @@
         <p:cNvGrpSpPr/>
         <p:nvPr/>
       </p:nvGrpSpPr>
-      <p:grpSpPr/>
+      <p:grpSpPr>
+        <a:xfrm>
+          <a:off x="0" y="0"/>
+          <a:ext cx="0" cy="0"/>
+          <a:chOff x="0" y="0"/>
+          <a:chExt cx="0" cy="0"/>
+        </a:xfrm>
+      </p:grpSpPr>
       <p:sp>
         <p:nvSpPr>
           <p:cNvPr id="2" name="Rectangle 1"/>
@@ -3916,6 +3939,7 @@
           <a:lstStyle/>
           <a:p>
             <a:pPr algn="ctr"/>
+            <a:endParaRPr/>
           </a:p>
         </p:txBody>
       </p:sp>
@@ -4096,7 +4120,7 @@
 </file>
 
 <file path=ppt/slides/slide12.xml><?xml version="1.0" encoding="utf-8"?>
-<p:sld xmlns:a="http://schemas.openxmlformats.org/drawingml/2006/main" xmlns:p="http://schemas.openxmlformats.org/presentationml/2006/main" xmlns:r="http://schemas.openxmlformats.org/officeDocument/2006/relationships">
+<p:sld xmlns:a="http://schemas.openxmlformats.org/drawingml/2006/main" xmlns:r="http://schemas.openxmlformats.org/officeDocument/2006/relationships" xmlns:p="http://schemas.openxmlformats.org/presentationml/2006/main">
   <p:cSld>
     <p:bg>
       <p:bgPr>
@@ -4112,7 +4136,14 @@
         <p:cNvGrpSpPr/>
         <p:nvPr/>
       </p:nvGrpSpPr>
-      <p:grpSpPr/>
+      <p:grpSpPr>
+        <a:xfrm>
+          <a:off x="0" y="0"/>
+          <a:ext cx="0" cy="0"/>
+          <a:chOff x="0" y="0"/>
+          <a:chExt cx="0" cy="0"/>
+        </a:xfrm>
+      </p:grpSpPr>
       <p:sp>
         <p:nvSpPr>
           <p:cNvPr id="2" name="Rectangle 1"/>
@@ -4153,6 +4184,7 @@
           <a:lstStyle/>
           <a:p>
             <a:pPr algn="ctr"/>
+            <a:endParaRPr/>
           </a:p>
         </p:txBody>
       </p:sp>
@@ -4333,7 +4365,7 @@
 </file>
 
 <file path=ppt/slides/slide13.xml><?xml version="1.0" encoding="utf-8"?>
-<p:sld xmlns:a="http://schemas.openxmlformats.org/drawingml/2006/main" xmlns:p="http://schemas.openxmlformats.org/presentationml/2006/main" xmlns:r="http://schemas.openxmlformats.org/officeDocument/2006/relationships">
+<p:sld xmlns:a="http://schemas.openxmlformats.org/drawingml/2006/main" xmlns:r="http://schemas.openxmlformats.org/officeDocument/2006/relationships" xmlns:p="http://schemas.openxmlformats.org/presentationml/2006/main">
   <p:cSld>
     <p:bg>
       <p:bgPr>
@@ -4349,7 +4381,14 @@
         <p:cNvGrpSpPr/>
         <p:nvPr/>
       </p:nvGrpSpPr>
-      <p:grpSpPr/>
+      <p:grpSpPr>
+        <a:xfrm>
+          <a:off x="0" y="0"/>
+          <a:ext cx="0" cy="0"/>
+          <a:chOff x="0" y="0"/>
+          <a:chExt cx="0" cy="0"/>
+        </a:xfrm>
+      </p:grpSpPr>
       <p:sp>
         <p:nvSpPr>
           <p:cNvPr id="2" name="Rectangle 1"/>
@@ -4390,6 +4429,7 @@
           <a:lstStyle/>
           <a:p>
             <a:pPr algn="ctr"/>
+            <a:endParaRPr/>
           </a:p>
         </p:txBody>
       </p:sp>
@@ -4473,7 +4513,7 @@
         </p:nvSpPr>
         <p:spPr>
           <a:xfrm>
-            <a:off x="731520" y="2103120"/>
+            <a:off x="731520" y="1645920"/>
             <a:ext cx="10515600" cy="365760"/>
           </a:xfrm>
           <a:prstGeom prst="rect">
@@ -4509,7 +4549,7 @@
         </p:nvSpPr>
         <p:spPr>
           <a:xfrm>
-            <a:off x="731520" y="2560320"/>
+            <a:off x="731520" y="2011680"/>
             <a:ext cx="10515600" cy="2011680"/>
           </a:xfrm>
           <a:prstGeom prst="rect">
@@ -4532,6 +4572,7 @@
               </a:defRPr>
             </a:pPr>
             <a:r>
+              <a:rPr dirty="0"/>
               <a:t>Ten possible responses appear on screen one at a time. For each, vote: is this a SYSTEM response (a setting, permission, or design choice) or a VERBAL response (something you'd say or do in person)? At the end, tally up: which column had more? Which type of response is stronger — in the moment vs long-term?</a:t>
             </a:r>
           </a:p>
@@ -4545,7 +4586,7 @@
         </p:nvSpPr>
         <p:spPr>
           <a:xfrm>
-            <a:off x="731520" y="4663440"/>
+            <a:off x="731520" y="3021987"/>
             <a:ext cx="10515600" cy="320040"/>
           </a:xfrm>
           <a:prstGeom prst="rect">
@@ -4568,6 +4609,7 @@
               </a:defRPr>
             </a:pPr>
             <a:r>
+              <a:rPr dirty="0"/>
               <a:t>PROMPTS</a:t>
             </a:r>
           </a:p>
@@ -4581,7 +4623,7 @@
         </p:nvSpPr>
         <p:spPr>
           <a:xfrm>
-            <a:off x="731520" y="4983480"/>
+            <a:off x="731520" y="3342027"/>
             <a:ext cx="10515600" cy="2103120"/>
           </a:xfrm>
           <a:prstGeom prst="rect">
@@ -4607,6 +4649,7 @@
               </a:defRPr>
             </a:pPr>
             <a:r>
+              <a:rPr dirty="0"/>
               <a:t>•  Turn on moderated answers in Kahoot before the next session</a:t>
             </a:r>
           </a:p>
@@ -4623,6 +4666,7 @@
               </a:defRPr>
             </a:pPr>
             <a:r>
+              <a:rPr dirty="0"/>
               <a:t>•  Take the person aside and have a quiet word</a:t>
             </a:r>
           </a:p>
@@ -4639,6 +4683,7 @@
               </a:defRPr>
             </a:pPr>
             <a:r>
+              <a:rPr dirty="0"/>
               <a:t>•  Change the WhatsApp group to admins-only posting</a:t>
             </a:r>
           </a:p>
@@ -4655,6 +4700,7 @@
               </a:defRPr>
             </a:pPr>
             <a:r>
+              <a:rPr dirty="0"/>
               <a:t>•  Message the young person: 'Can we talk tomorrow at the club?'</a:t>
             </a:r>
           </a:p>
@@ -4671,6 +4717,7 @@
               </a:defRPr>
             </a:pPr>
             <a:r>
+              <a:rPr dirty="0"/>
               <a:t>•  Set working hours on your work Instagram (DND after 6pm)</a:t>
             </a:r>
           </a:p>
@@ -4687,6 +4734,7 @@
               </a:defRPr>
             </a:pPr>
             <a:r>
+              <a:rPr dirty="0"/>
               <a:t>•  Remove the leaderboard from the Kahoot permanently</a:t>
             </a:r>
           </a:p>
@@ -4703,6 +4751,7 @@
               </a:defRPr>
             </a:pPr>
             <a:r>
+              <a:rPr dirty="0"/>
               <a:t>•  Escalate to your DSL (Designated Safeguarding Lead)</a:t>
             </a:r>
           </a:p>
@@ -4719,6 +4768,7 @@
               </a:defRPr>
             </a:pPr>
             <a:r>
+              <a:rPr dirty="0"/>
               <a:t>•  Post a group rule: 'No screenshots — this is a closed group'</a:t>
             </a:r>
           </a:p>
@@ -4735,6 +4785,7 @@
               </a:defRPr>
             </a:pPr>
             <a:r>
+              <a:rPr dirty="0"/>
               <a:t>•  Delete the offensive message publicly so everyone sees action</a:t>
             </a:r>
           </a:p>
@@ -4751,6 +4802,7 @@
               </a:defRPr>
             </a:pPr>
             <a:r>
+              <a:rPr dirty="0"/>
               <a:t>•  Reply to the DM: 'This needs to be in a safer space — can I call you?'</a:t>
             </a:r>
           </a:p>
@@ -4825,7 +4877,7 @@
 </file>
 
 <file path=ppt/slides/slide14.xml><?xml version="1.0" encoding="utf-8"?>
-<p:sld xmlns:a="http://schemas.openxmlformats.org/drawingml/2006/main" xmlns:p="http://schemas.openxmlformats.org/presentationml/2006/main" xmlns:r="http://schemas.openxmlformats.org/officeDocument/2006/relationships">
+<p:sld xmlns:a="http://schemas.openxmlformats.org/drawingml/2006/main" xmlns:r="http://schemas.openxmlformats.org/officeDocument/2006/relationships" xmlns:p="http://schemas.openxmlformats.org/presentationml/2006/main">
   <p:cSld>
     <p:bg>
       <p:bgPr>
@@ -4841,7 +4893,14 @@
         <p:cNvGrpSpPr/>
         <p:nvPr/>
       </p:nvGrpSpPr>
-      <p:grpSpPr/>
+      <p:grpSpPr>
+        <a:xfrm>
+          <a:off x="0" y="0"/>
+          <a:ext cx="0" cy="0"/>
+          <a:chOff x="0" y="0"/>
+          <a:chExt cx="0" cy="0"/>
+        </a:xfrm>
+      </p:grpSpPr>
       <p:sp>
         <p:nvSpPr>
           <p:cNvPr id="2" name="Rectangle 1"/>
@@ -4882,6 +4941,7 @@
           <a:lstStyle/>
           <a:p>
             <a:pPr algn="ctr"/>
+            <a:endParaRPr/>
           </a:p>
         </p:txBody>
       </p:sp>
@@ -5062,7 +5122,7 @@
 </file>
 
 <file path=ppt/slides/slide15.xml><?xml version="1.0" encoding="utf-8"?>
-<p:sld xmlns:a="http://schemas.openxmlformats.org/drawingml/2006/main" xmlns:p="http://schemas.openxmlformats.org/presentationml/2006/main" xmlns:r="http://schemas.openxmlformats.org/officeDocument/2006/relationships">
+<p:sld xmlns:a="http://schemas.openxmlformats.org/drawingml/2006/main" xmlns:r="http://schemas.openxmlformats.org/officeDocument/2006/relationships" xmlns:p="http://schemas.openxmlformats.org/presentationml/2006/main">
   <p:cSld>
     <p:bg>
       <p:bgPr>
@@ -5078,7 +5138,14 @@
         <p:cNvGrpSpPr/>
         <p:nvPr/>
       </p:nvGrpSpPr>
-      <p:grpSpPr/>
+      <p:grpSpPr>
+        <a:xfrm>
+          <a:off x="0" y="0"/>
+          <a:ext cx="0" cy="0"/>
+          <a:chOff x="0" y="0"/>
+          <a:chExt cx="0" cy="0"/>
+        </a:xfrm>
+      </p:grpSpPr>
       <p:sp>
         <p:nvSpPr>
           <p:cNvPr id="2" name="Rectangle 1"/>
@@ -5119,6 +5186,7 @@
           <a:lstStyle/>
           <a:p>
             <a:pPr algn="ctr"/>
+            <a:endParaRPr/>
           </a:p>
         </p:txBody>
       </p:sp>
@@ -5335,7 +5403,7 @@
 </file>
 
 <file path=ppt/slides/slide16.xml><?xml version="1.0" encoding="utf-8"?>
-<p:sld xmlns:a="http://schemas.openxmlformats.org/drawingml/2006/main" xmlns:p="http://schemas.openxmlformats.org/presentationml/2006/main" xmlns:r="http://schemas.openxmlformats.org/officeDocument/2006/relationships">
+<p:sld xmlns:a="http://schemas.openxmlformats.org/drawingml/2006/main" xmlns:r="http://schemas.openxmlformats.org/officeDocument/2006/relationships" xmlns:p="http://schemas.openxmlformats.org/presentationml/2006/main">
   <p:cSld>
     <p:bg>
       <p:bgPr>
@@ -5351,7 +5419,14 @@
         <p:cNvGrpSpPr/>
         <p:nvPr/>
       </p:nvGrpSpPr>
-      <p:grpSpPr/>
+      <p:grpSpPr>
+        <a:xfrm>
+          <a:off x="0" y="0"/>
+          <a:ext cx="0" cy="0"/>
+          <a:chOff x="0" y="0"/>
+          <a:chExt cx="0" cy="0"/>
+        </a:xfrm>
+      </p:grpSpPr>
       <p:sp>
         <p:nvSpPr>
           <p:cNvPr id="2" name="Rectangle 1"/>
@@ -5392,6 +5467,7 @@
           <a:lstStyle/>
           <a:p>
             <a:pPr algn="ctr"/>
+            <a:endParaRPr/>
           </a:p>
         </p:txBody>
       </p:sp>
@@ -5651,7 +5727,7 @@
 </file>
 
 <file path=ppt/slides/slide17.xml><?xml version="1.0" encoding="utf-8"?>
-<p:sld xmlns:a="http://schemas.openxmlformats.org/drawingml/2006/main" xmlns:p="http://schemas.openxmlformats.org/presentationml/2006/main" xmlns:r="http://schemas.openxmlformats.org/officeDocument/2006/relationships">
+<p:sld xmlns:a="http://schemas.openxmlformats.org/drawingml/2006/main" xmlns:r="http://schemas.openxmlformats.org/officeDocument/2006/relationships" xmlns:p="http://schemas.openxmlformats.org/presentationml/2006/main">
   <p:cSld>
     <p:bg>
       <p:bgPr>
@@ -5667,7 +5743,14 @@
         <p:cNvGrpSpPr/>
         <p:nvPr/>
       </p:nvGrpSpPr>
-      <p:grpSpPr/>
+      <p:grpSpPr>
+        <a:xfrm>
+          <a:off x="0" y="0"/>
+          <a:ext cx="0" cy="0"/>
+          <a:chOff x="0" y="0"/>
+          <a:chExt cx="0" cy="0"/>
+        </a:xfrm>
+      </p:grpSpPr>
       <p:sp>
         <p:nvSpPr>
           <p:cNvPr id="2" name="Rectangle 1"/>
@@ -5708,6 +5791,7 @@
           <a:lstStyle/>
           <a:p>
             <a:pPr algn="ctr"/>
+            <a:endParaRPr/>
           </a:p>
         </p:txBody>
       </p:sp>
@@ -5888,7 +5972,7 @@
 </file>
 
 <file path=ppt/slides/slide18.xml><?xml version="1.0" encoding="utf-8"?>
-<p:sld xmlns:a="http://schemas.openxmlformats.org/drawingml/2006/main" xmlns:p="http://schemas.openxmlformats.org/presentationml/2006/main" xmlns:r="http://schemas.openxmlformats.org/officeDocument/2006/relationships">
+<p:sld xmlns:a="http://schemas.openxmlformats.org/drawingml/2006/main" xmlns:r="http://schemas.openxmlformats.org/officeDocument/2006/relationships" xmlns:p="http://schemas.openxmlformats.org/presentationml/2006/main">
   <p:cSld>
     <p:bg>
       <p:bgPr>
@@ -5904,7 +5988,14 @@
         <p:cNvGrpSpPr/>
         <p:nvPr/>
       </p:nvGrpSpPr>
-      <p:grpSpPr/>
+      <p:grpSpPr>
+        <a:xfrm>
+          <a:off x="0" y="0"/>
+          <a:ext cx="0" cy="0"/>
+          <a:chOff x="0" y="0"/>
+          <a:chExt cx="0" cy="0"/>
+        </a:xfrm>
+      </p:grpSpPr>
       <p:sp>
         <p:nvSpPr>
           <p:cNvPr id="2" name="Rectangle 1"/>
@@ -5945,6 +6036,7 @@
           <a:lstStyle/>
           <a:p>
             <a:pPr algn="ctr"/>
+            <a:endParaRPr/>
           </a:p>
         </p:txBody>
       </p:sp>
@@ -6028,7 +6120,7 @@
         </p:nvSpPr>
         <p:spPr>
           <a:xfrm>
-            <a:off x="731520" y="2103120"/>
+            <a:off x="731520" y="1563624"/>
             <a:ext cx="10515600" cy="365760"/>
           </a:xfrm>
           <a:prstGeom prst="rect">
@@ -6064,7 +6156,7 @@
         </p:nvSpPr>
         <p:spPr>
           <a:xfrm>
-            <a:off x="731520" y="2560320"/>
+            <a:off x="731520" y="2020824"/>
             <a:ext cx="10515600" cy="2011680"/>
           </a:xfrm>
           <a:prstGeom prst="rect">
@@ -6100,7 +6192,7 @@
         </p:nvSpPr>
         <p:spPr>
           <a:xfrm>
-            <a:off x="731520" y="4663440"/>
+            <a:off x="731520" y="3031236"/>
             <a:ext cx="10515600" cy="320040"/>
           </a:xfrm>
           <a:prstGeom prst="rect">
@@ -6136,7 +6228,7 @@
         </p:nvSpPr>
         <p:spPr>
           <a:xfrm>
-            <a:off x="731520" y="4983480"/>
+            <a:off x="731520" y="3351276"/>
             <a:ext cx="10515600" cy="2103120"/>
           </a:xfrm>
           <a:prstGeom prst="rect">
@@ -6162,6 +6254,7 @@
               </a:defRPr>
             </a:pPr>
             <a:r>
+              <a:rPr dirty="0"/>
               <a:t>•  No 1-to-1 DMs with young people outside work hours</a:t>
             </a:r>
           </a:p>
@@ -6178,6 +6271,7 @@
               </a:defRPr>
             </a:pPr>
             <a:r>
+              <a:rPr dirty="0"/>
               <a:t>•  All youth club WhatsApp groups must include two staff members</a:t>
             </a:r>
           </a:p>
@@ -6194,6 +6288,7 @@
               </a:defRPr>
             </a:pPr>
             <a:r>
+              <a:rPr dirty="0"/>
               <a:t>•  Never add a young person on your personal social media</a:t>
             </a:r>
           </a:p>
@@ -6210,6 +6305,7 @@
               </a:defRPr>
             </a:pPr>
             <a:r>
+              <a:rPr dirty="0"/>
               <a:t>•  Screenshot and log every safeguarding disclosure</a:t>
             </a:r>
           </a:p>
@@ -6226,6 +6322,7 @@
               </a:defRPr>
             </a:pPr>
             <a:r>
+              <a:rPr dirty="0"/>
               <a:t>•  Only use approved platforms (the ones signed off by the trustees)</a:t>
             </a:r>
           </a:p>
@@ -6242,6 +6339,7 @@
               </a:defRPr>
             </a:pPr>
             <a:r>
+              <a:rPr dirty="0"/>
               <a:t>•  All live sessions must be recorded</a:t>
             </a:r>
           </a:p>
@@ -6258,6 +6356,7 @@
               </a:defRPr>
             </a:pPr>
             <a:r>
+              <a:rPr dirty="0"/>
               <a:t>•  Young people must use their real name on any group you run</a:t>
             </a:r>
           </a:p>
@@ -6332,7 +6431,7 @@
 </file>
 
 <file path=ppt/slides/slide19.xml><?xml version="1.0" encoding="utf-8"?>
-<p:sld xmlns:a="http://schemas.openxmlformats.org/drawingml/2006/main" xmlns:p="http://schemas.openxmlformats.org/presentationml/2006/main" xmlns:r="http://schemas.openxmlformats.org/officeDocument/2006/relationships">
+<p:sld xmlns:a="http://schemas.openxmlformats.org/drawingml/2006/main" xmlns:r="http://schemas.openxmlformats.org/officeDocument/2006/relationships" xmlns:p="http://schemas.openxmlformats.org/presentationml/2006/main">
   <p:cSld>
     <p:bg>
       <p:bgPr>
@@ -6348,7 +6447,14 @@
         <p:cNvGrpSpPr/>
         <p:nvPr/>
       </p:nvGrpSpPr>
-      <p:grpSpPr/>
+      <p:grpSpPr>
+        <a:xfrm>
+          <a:off x="0" y="0"/>
+          <a:ext cx="0" cy="0"/>
+          <a:chOff x="0" y="0"/>
+          <a:chExt cx="0" cy="0"/>
+        </a:xfrm>
+      </p:grpSpPr>
       <p:sp>
         <p:nvSpPr>
           <p:cNvPr id="2" name="Rectangle 1"/>
@@ -6389,6 +6495,7 @@
           <a:lstStyle/>
           <a:p>
             <a:pPr algn="ctr"/>
+            <a:endParaRPr/>
           </a:p>
         </p:txBody>
       </p:sp>
@@ -6605,7 +6712,7 @@
 </file>
 
 <file path=ppt/slides/slide2.xml><?xml version="1.0" encoding="utf-8"?>
-<p:sld xmlns:a="http://schemas.openxmlformats.org/drawingml/2006/main" xmlns:p="http://schemas.openxmlformats.org/presentationml/2006/main" xmlns:r="http://schemas.openxmlformats.org/officeDocument/2006/relationships">
+<p:sld xmlns:a="http://schemas.openxmlformats.org/drawingml/2006/main" xmlns:r="http://schemas.openxmlformats.org/officeDocument/2006/relationships" xmlns:p="http://schemas.openxmlformats.org/presentationml/2006/main">
   <p:cSld>
     <p:bg>
       <p:bgPr>
@@ -6621,7 +6728,14 @@
         <p:cNvGrpSpPr/>
         <p:nvPr/>
       </p:nvGrpSpPr>
-      <p:grpSpPr/>
+      <p:grpSpPr>
+        <a:xfrm>
+          <a:off x="0" y="0"/>
+          <a:ext cx="0" cy="0"/>
+          <a:chOff x="0" y="0"/>
+          <a:chExt cx="0" cy="0"/>
+        </a:xfrm>
+      </p:grpSpPr>
       <p:sp>
         <p:nvSpPr>
           <p:cNvPr id="2" name="Rectangle 1"/>
@@ -6662,6 +6776,7 @@
           <a:lstStyle/>
           <a:p>
             <a:pPr algn="ctr"/>
+            <a:endParaRPr/>
           </a:p>
         </p:txBody>
       </p:sp>
@@ -6705,6 +6820,7 @@
           <a:lstStyle/>
           <a:p>
             <a:pPr algn="ctr"/>
+            <a:endParaRPr/>
           </a:p>
         </p:txBody>
       </p:sp>
@@ -6748,6 +6864,7 @@
           <a:lstStyle/>
           <a:p>
             <a:pPr algn="ctr"/>
+            <a:endParaRPr/>
           </a:p>
         </p:txBody>
       </p:sp>
@@ -7063,7 +7180,7 @@
 </file>
 
 <file path=ppt/slides/slide20.xml><?xml version="1.0" encoding="utf-8"?>
-<p:sld xmlns:a="http://schemas.openxmlformats.org/drawingml/2006/main" xmlns:p="http://schemas.openxmlformats.org/presentationml/2006/main" xmlns:r="http://schemas.openxmlformats.org/officeDocument/2006/relationships">
+<p:sld xmlns:a="http://schemas.openxmlformats.org/drawingml/2006/main" xmlns:r="http://schemas.openxmlformats.org/officeDocument/2006/relationships" xmlns:p="http://schemas.openxmlformats.org/presentationml/2006/main">
   <p:cSld>
     <p:bg>
       <p:bgPr>
@@ -7079,7 +7196,14 @@
         <p:cNvGrpSpPr/>
         <p:nvPr/>
       </p:nvGrpSpPr>
-      <p:grpSpPr/>
+      <p:grpSpPr>
+        <a:xfrm>
+          <a:off x="0" y="0"/>
+          <a:ext cx="0" cy="0"/>
+          <a:chOff x="0" y="0"/>
+          <a:chExt cx="0" cy="0"/>
+        </a:xfrm>
+      </p:grpSpPr>
       <p:sp>
         <p:nvSpPr>
           <p:cNvPr id="2" name="Rectangle 1"/>
@@ -7120,6 +7244,7 @@
           <a:lstStyle/>
           <a:p>
             <a:pPr algn="ctr"/>
+            <a:endParaRPr/>
           </a:p>
         </p:txBody>
       </p:sp>
@@ -7300,7 +7425,7 @@
 </file>
 
 <file path=ppt/slides/slide21.xml><?xml version="1.0" encoding="utf-8"?>
-<p:sld xmlns:a="http://schemas.openxmlformats.org/drawingml/2006/main" xmlns:p="http://schemas.openxmlformats.org/presentationml/2006/main" xmlns:r="http://schemas.openxmlformats.org/officeDocument/2006/relationships">
+<p:sld xmlns:a="http://schemas.openxmlformats.org/drawingml/2006/main" xmlns:r="http://schemas.openxmlformats.org/officeDocument/2006/relationships" xmlns:p="http://schemas.openxmlformats.org/presentationml/2006/main">
   <p:cSld>
     <p:bg>
       <p:bgPr>
@@ -7316,7 +7441,14 @@
         <p:cNvGrpSpPr/>
         <p:nvPr/>
       </p:nvGrpSpPr>
-      <p:grpSpPr/>
+      <p:grpSpPr>
+        <a:xfrm>
+          <a:off x="0" y="0"/>
+          <a:ext cx="0" cy="0"/>
+          <a:chOff x="0" y="0"/>
+          <a:chExt cx="0" cy="0"/>
+        </a:xfrm>
+      </p:grpSpPr>
       <p:sp>
         <p:nvSpPr>
           <p:cNvPr id="2" name="Rectangle 1"/>
@@ -7357,6 +7489,7 @@
           <a:lstStyle/>
           <a:p>
             <a:pPr algn="ctr"/>
+            <a:endParaRPr/>
           </a:p>
         </p:txBody>
       </p:sp>
@@ -7652,7 +7785,7 @@
 </file>
 
 <file path=ppt/slides/slide22.xml><?xml version="1.0" encoding="utf-8"?>
-<p:sld xmlns:a="http://schemas.openxmlformats.org/drawingml/2006/main" xmlns:p="http://schemas.openxmlformats.org/presentationml/2006/main" xmlns:r="http://schemas.openxmlformats.org/officeDocument/2006/relationships">
+<p:sld xmlns:a="http://schemas.openxmlformats.org/drawingml/2006/main" xmlns:r="http://schemas.openxmlformats.org/officeDocument/2006/relationships" xmlns:p="http://schemas.openxmlformats.org/presentationml/2006/main">
   <p:cSld>
     <p:bg>
       <p:bgPr>
@@ -7668,7 +7801,14 @@
         <p:cNvGrpSpPr/>
         <p:nvPr/>
       </p:nvGrpSpPr>
-      <p:grpSpPr/>
+      <p:grpSpPr>
+        <a:xfrm>
+          <a:off x="0" y="0"/>
+          <a:ext cx="0" cy="0"/>
+          <a:chOff x="0" y="0"/>
+          <a:chExt cx="0" cy="0"/>
+        </a:xfrm>
+      </p:grpSpPr>
       <p:sp>
         <p:nvSpPr>
           <p:cNvPr id="2" name="Rectangle 1"/>
@@ -7709,6 +7849,7 @@
           <a:lstStyle/>
           <a:p>
             <a:pPr algn="ctr"/>
+            <a:endParaRPr/>
           </a:p>
         </p:txBody>
       </p:sp>
@@ -7889,7 +8030,7 @@
 </file>
 
 <file path=ppt/slides/slide23.xml><?xml version="1.0" encoding="utf-8"?>
-<p:sld xmlns:a="http://schemas.openxmlformats.org/drawingml/2006/main" xmlns:p="http://schemas.openxmlformats.org/presentationml/2006/main" xmlns:r="http://schemas.openxmlformats.org/officeDocument/2006/relationships">
+<p:sld xmlns:a="http://schemas.openxmlformats.org/drawingml/2006/main" xmlns:r="http://schemas.openxmlformats.org/officeDocument/2006/relationships" xmlns:p="http://schemas.openxmlformats.org/presentationml/2006/main">
   <p:cSld>
     <p:bg>
       <p:bgPr>
@@ -7905,7 +8046,14 @@
         <p:cNvGrpSpPr/>
         <p:nvPr/>
       </p:nvGrpSpPr>
-      <p:grpSpPr/>
+      <p:grpSpPr>
+        <a:xfrm>
+          <a:off x="0" y="0"/>
+          <a:ext cx="0" cy="0"/>
+          <a:chOff x="0" y="0"/>
+          <a:chExt cx="0" cy="0"/>
+        </a:xfrm>
+      </p:grpSpPr>
       <p:sp>
         <p:nvSpPr>
           <p:cNvPr id="2" name="Rectangle 1"/>
@@ -7946,6 +8094,7 @@
           <a:lstStyle/>
           <a:p>
             <a:pPr algn="ctr"/>
+            <a:endParaRPr/>
           </a:p>
         </p:txBody>
       </p:sp>
@@ -8162,7 +8311,7 @@
 </file>
 
 <file path=ppt/slides/slide24.xml><?xml version="1.0" encoding="utf-8"?>
-<p:sld xmlns:a="http://schemas.openxmlformats.org/drawingml/2006/main" xmlns:p="http://schemas.openxmlformats.org/presentationml/2006/main" xmlns:r="http://schemas.openxmlformats.org/officeDocument/2006/relationships">
+<p:sld xmlns:a="http://schemas.openxmlformats.org/drawingml/2006/main" xmlns:r="http://schemas.openxmlformats.org/officeDocument/2006/relationships" xmlns:p="http://schemas.openxmlformats.org/presentationml/2006/main">
   <p:cSld>
     <p:bg>
       <p:bgPr>
@@ -8178,7 +8327,14 @@
         <p:cNvGrpSpPr/>
         <p:nvPr/>
       </p:nvGrpSpPr>
-      <p:grpSpPr/>
+      <p:grpSpPr>
+        <a:xfrm>
+          <a:off x="0" y="0"/>
+          <a:ext cx="0" cy="0"/>
+          <a:chOff x="0" y="0"/>
+          <a:chExt cx="0" cy="0"/>
+        </a:xfrm>
+      </p:grpSpPr>
       <p:sp>
         <p:nvSpPr>
           <p:cNvPr id="2" name="Rectangle 1"/>
@@ -8219,6 +8375,7 @@
           <a:lstStyle/>
           <a:p>
             <a:pPr algn="ctr"/>
+            <a:endParaRPr/>
           </a:p>
         </p:txBody>
       </p:sp>
@@ -8399,7 +8556,7 @@
 </file>
 
 <file path=ppt/slides/slide25.xml><?xml version="1.0" encoding="utf-8"?>
-<p:sld xmlns:a="http://schemas.openxmlformats.org/drawingml/2006/main" xmlns:p="http://schemas.openxmlformats.org/presentationml/2006/main" xmlns:r="http://schemas.openxmlformats.org/officeDocument/2006/relationships">
+<p:sld xmlns:a="http://schemas.openxmlformats.org/drawingml/2006/main" xmlns:r="http://schemas.openxmlformats.org/officeDocument/2006/relationships" xmlns:p="http://schemas.openxmlformats.org/presentationml/2006/main">
   <p:cSld>
     <p:bg>
       <p:bgPr>
@@ -8415,7 +8572,14 @@
         <p:cNvGrpSpPr/>
         <p:nvPr/>
       </p:nvGrpSpPr>
-      <p:grpSpPr/>
+      <p:grpSpPr>
+        <a:xfrm>
+          <a:off x="0" y="0"/>
+          <a:ext cx="0" cy="0"/>
+          <a:chOff x="0" y="0"/>
+          <a:chExt cx="0" cy="0"/>
+        </a:xfrm>
+      </p:grpSpPr>
       <p:sp>
         <p:nvSpPr>
           <p:cNvPr id="2" name="Rectangle 1"/>
@@ -8456,6 +8620,7 @@
           <a:lstStyle/>
           <a:p>
             <a:pPr algn="ctr"/>
+            <a:endParaRPr/>
           </a:p>
         </p:txBody>
       </p:sp>
@@ -8575,7 +8740,7 @@
         </p:nvSpPr>
         <p:spPr>
           <a:xfrm>
-            <a:off x="731520" y="4206240"/>
+            <a:off x="731520" y="3429000"/>
             <a:ext cx="10515600" cy="320040"/>
           </a:xfrm>
           <a:prstGeom prst="rect">
@@ -8611,7 +8776,7 @@
         </p:nvSpPr>
         <p:spPr>
           <a:xfrm>
-            <a:off x="731520" y="4526280"/>
+            <a:off x="731520" y="3749040"/>
             <a:ext cx="10515600" cy="2103120"/>
           </a:xfrm>
           <a:prstGeom prst="rect">
@@ -8791,7 +8956,7 @@
 </file>
 
 <file path=ppt/slides/slide26.xml><?xml version="1.0" encoding="utf-8"?>
-<p:sld xmlns:a="http://schemas.openxmlformats.org/drawingml/2006/main" xmlns:p="http://schemas.openxmlformats.org/presentationml/2006/main" xmlns:r="http://schemas.openxmlformats.org/officeDocument/2006/relationships">
+<p:sld xmlns:a="http://schemas.openxmlformats.org/drawingml/2006/main" xmlns:r="http://schemas.openxmlformats.org/officeDocument/2006/relationships" xmlns:p="http://schemas.openxmlformats.org/presentationml/2006/main">
   <p:cSld>
     <p:bg>
       <p:bgPr>
@@ -8807,7 +8972,14 @@
         <p:cNvGrpSpPr/>
         <p:nvPr/>
       </p:nvGrpSpPr>
-      <p:grpSpPr/>
+      <p:grpSpPr>
+        <a:xfrm>
+          <a:off x="0" y="0"/>
+          <a:ext cx="0" cy="0"/>
+          <a:chOff x="0" y="0"/>
+          <a:chExt cx="0" cy="0"/>
+        </a:xfrm>
+      </p:grpSpPr>
       <p:sp>
         <p:nvSpPr>
           <p:cNvPr id="2" name="Rectangle 1"/>
@@ -8848,6 +9020,7 @@
           <a:lstStyle/>
           <a:p>
             <a:pPr algn="ctr"/>
+            <a:endParaRPr/>
           </a:p>
         </p:txBody>
       </p:sp>
@@ -9028,7 +9201,7 @@
 </file>
 
 <file path=ppt/slides/slide27.xml><?xml version="1.0" encoding="utf-8"?>
-<p:sld xmlns:a="http://schemas.openxmlformats.org/drawingml/2006/main" xmlns:p="http://schemas.openxmlformats.org/presentationml/2006/main" xmlns:r="http://schemas.openxmlformats.org/officeDocument/2006/relationships">
+<p:sld xmlns:a="http://schemas.openxmlformats.org/drawingml/2006/main" xmlns:r="http://schemas.openxmlformats.org/officeDocument/2006/relationships" xmlns:p="http://schemas.openxmlformats.org/presentationml/2006/main">
   <p:cSld>
     <p:bg>
       <p:bgPr>
@@ -9044,7 +9217,14 @@
         <p:cNvGrpSpPr/>
         <p:nvPr/>
       </p:nvGrpSpPr>
-      <p:grpSpPr/>
+      <p:grpSpPr>
+        <a:xfrm>
+          <a:off x="0" y="0"/>
+          <a:ext cx="0" cy="0"/>
+          <a:chOff x="0" y="0"/>
+          <a:chExt cx="0" cy="0"/>
+        </a:xfrm>
+      </p:grpSpPr>
       <p:sp>
         <p:nvSpPr>
           <p:cNvPr id="2" name="Rectangle 1"/>
@@ -9085,6 +9265,7 @@
           <a:lstStyle/>
           <a:p>
             <a:pPr algn="ctr"/>
+            <a:endParaRPr/>
           </a:p>
         </p:txBody>
       </p:sp>
@@ -9277,7 +9458,7 @@
 </file>
 
 <file path=ppt/slides/slide28.xml><?xml version="1.0" encoding="utf-8"?>
-<p:sld xmlns:a="http://schemas.openxmlformats.org/drawingml/2006/main" xmlns:p="http://schemas.openxmlformats.org/presentationml/2006/main" xmlns:r="http://schemas.openxmlformats.org/officeDocument/2006/relationships">
+<p:sld xmlns:a="http://schemas.openxmlformats.org/drawingml/2006/main" xmlns:r="http://schemas.openxmlformats.org/officeDocument/2006/relationships" xmlns:p="http://schemas.openxmlformats.org/presentationml/2006/main">
   <p:cSld>
     <p:bg>
       <p:bgPr>
@@ -9293,7 +9474,14 @@
         <p:cNvGrpSpPr/>
         <p:nvPr/>
       </p:nvGrpSpPr>
-      <p:grpSpPr/>
+      <p:grpSpPr>
+        <a:xfrm>
+          <a:off x="0" y="0"/>
+          <a:ext cx="0" cy="0"/>
+          <a:chOff x="0" y="0"/>
+          <a:chExt cx="0" cy="0"/>
+        </a:xfrm>
+      </p:grpSpPr>
       <p:sp>
         <p:nvSpPr>
           <p:cNvPr id="2" name="Rectangle 1"/>
@@ -9334,6 +9522,7 @@
           <a:lstStyle/>
           <a:p>
             <a:pPr algn="ctr"/>
+            <a:endParaRPr/>
           </a:p>
         </p:txBody>
       </p:sp>
@@ -9514,7 +9703,7 @@
 </file>
 
 <file path=ppt/slides/slide29.xml><?xml version="1.0" encoding="utf-8"?>
-<p:sld xmlns:a="http://schemas.openxmlformats.org/drawingml/2006/main" xmlns:p="http://schemas.openxmlformats.org/presentationml/2006/main" xmlns:r="http://schemas.openxmlformats.org/officeDocument/2006/relationships">
+<p:sld xmlns:a="http://schemas.openxmlformats.org/drawingml/2006/main" xmlns:r="http://schemas.openxmlformats.org/officeDocument/2006/relationships" xmlns:p="http://schemas.openxmlformats.org/presentationml/2006/main">
   <p:cSld>
     <p:bg>
       <p:bgPr>
@@ -9530,7 +9719,14 @@
         <p:cNvGrpSpPr/>
         <p:nvPr/>
       </p:nvGrpSpPr>
-      <p:grpSpPr/>
+      <p:grpSpPr>
+        <a:xfrm>
+          <a:off x="0" y="0"/>
+          <a:ext cx="0" cy="0"/>
+          <a:chOff x="0" y="0"/>
+          <a:chExt cx="0" cy="0"/>
+        </a:xfrm>
+      </p:grpSpPr>
       <p:sp>
         <p:nvSpPr>
           <p:cNvPr id="2" name="Rectangle 1"/>
@@ -9571,6 +9767,7 @@
           <a:lstStyle/>
           <a:p>
             <a:pPr algn="ctr"/>
+            <a:endParaRPr/>
           </a:p>
         </p:txBody>
       </p:sp>
@@ -9751,7 +9948,7 @@
 </file>
 
 <file path=ppt/slides/slide3.xml><?xml version="1.0" encoding="utf-8"?>
-<p:sld xmlns:a="http://schemas.openxmlformats.org/drawingml/2006/main" xmlns:p="http://schemas.openxmlformats.org/presentationml/2006/main" xmlns:r="http://schemas.openxmlformats.org/officeDocument/2006/relationships">
+<p:sld xmlns:a="http://schemas.openxmlformats.org/drawingml/2006/main" xmlns:r="http://schemas.openxmlformats.org/officeDocument/2006/relationships" xmlns:p="http://schemas.openxmlformats.org/presentationml/2006/main">
   <p:cSld>
     <p:bg>
       <p:bgPr>
@@ -9767,7 +9964,14 @@
         <p:cNvGrpSpPr/>
         <p:nvPr/>
       </p:nvGrpSpPr>
-      <p:grpSpPr/>
+      <p:grpSpPr>
+        <a:xfrm>
+          <a:off x="0" y="0"/>
+          <a:ext cx="0" cy="0"/>
+          <a:chOff x="0" y="0"/>
+          <a:chExt cx="0" cy="0"/>
+        </a:xfrm>
+      </p:grpSpPr>
       <p:sp>
         <p:nvSpPr>
           <p:cNvPr id="2" name="Rectangle 1"/>
@@ -9808,6 +10012,7 @@
           <a:lstStyle/>
           <a:p>
             <a:pPr algn="ctr"/>
+            <a:endParaRPr/>
           </a:p>
         </p:txBody>
       </p:sp>
@@ -10000,7 +10205,7 @@
 </file>
 
 <file path=ppt/slides/slide30.xml><?xml version="1.0" encoding="utf-8"?>
-<p:sld xmlns:a="http://schemas.openxmlformats.org/drawingml/2006/main" xmlns:p="http://schemas.openxmlformats.org/presentationml/2006/main" xmlns:r="http://schemas.openxmlformats.org/officeDocument/2006/relationships">
+<p:sld xmlns:a="http://schemas.openxmlformats.org/drawingml/2006/main" xmlns:r="http://schemas.openxmlformats.org/officeDocument/2006/relationships" xmlns:p="http://schemas.openxmlformats.org/presentationml/2006/main">
   <p:cSld>
     <p:bg>
       <p:bgPr>
@@ -10016,7 +10221,14 @@
         <p:cNvGrpSpPr/>
         <p:nvPr/>
       </p:nvGrpSpPr>
-      <p:grpSpPr/>
+      <p:grpSpPr>
+        <a:xfrm>
+          <a:off x="0" y="0"/>
+          <a:ext cx="0" cy="0"/>
+          <a:chOff x="0" y="0"/>
+          <a:chExt cx="0" cy="0"/>
+        </a:xfrm>
+      </p:grpSpPr>
       <p:sp>
         <p:nvSpPr>
           <p:cNvPr id="2" name="Rectangle 1"/>
@@ -10057,6 +10269,7 @@
           <a:lstStyle/>
           <a:p>
             <a:pPr algn="ctr"/>
+            <a:endParaRPr/>
           </a:p>
         </p:txBody>
       </p:sp>
@@ -10273,7 +10486,7 @@
 </file>
 
 <file path=ppt/slides/slide31.xml><?xml version="1.0" encoding="utf-8"?>
-<p:sld xmlns:a="http://schemas.openxmlformats.org/drawingml/2006/main" xmlns:p="http://schemas.openxmlformats.org/presentationml/2006/main" xmlns:r="http://schemas.openxmlformats.org/officeDocument/2006/relationships">
+<p:sld xmlns:a="http://schemas.openxmlformats.org/drawingml/2006/main" xmlns:r="http://schemas.openxmlformats.org/officeDocument/2006/relationships" xmlns:p="http://schemas.openxmlformats.org/presentationml/2006/main">
   <p:cSld>
     <p:bg>
       <p:bgPr>
@@ -10289,7 +10502,14 @@
         <p:cNvGrpSpPr/>
         <p:nvPr/>
       </p:nvGrpSpPr>
-      <p:grpSpPr/>
+      <p:grpSpPr>
+        <a:xfrm>
+          <a:off x="0" y="0"/>
+          <a:ext cx="0" cy="0"/>
+          <a:chOff x="0" y="0"/>
+          <a:chExt cx="0" cy="0"/>
+        </a:xfrm>
+      </p:grpSpPr>
       <p:sp>
         <p:nvSpPr>
           <p:cNvPr id="2" name="Rectangle 1"/>
@@ -10330,6 +10550,7 @@
           <a:lstStyle/>
           <a:p>
             <a:pPr algn="ctr"/>
+            <a:endParaRPr/>
           </a:p>
         </p:txBody>
       </p:sp>
@@ -10510,7 +10731,7 @@
 </file>
 
 <file path=ppt/slides/slide32.xml><?xml version="1.0" encoding="utf-8"?>
-<p:sld xmlns:a="http://schemas.openxmlformats.org/drawingml/2006/main" xmlns:p="http://schemas.openxmlformats.org/presentationml/2006/main" xmlns:r="http://schemas.openxmlformats.org/officeDocument/2006/relationships">
+<p:sld xmlns:a="http://schemas.openxmlformats.org/drawingml/2006/main" xmlns:r="http://schemas.openxmlformats.org/officeDocument/2006/relationships" xmlns:p="http://schemas.openxmlformats.org/presentationml/2006/main">
   <p:cSld>
     <p:bg>
       <p:bgPr>
@@ -10526,7 +10747,14 @@
         <p:cNvGrpSpPr/>
         <p:nvPr/>
       </p:nvGrpSpPr>
-      <p:grpSpPr/>
+      <p:grpSpPr>
+        <a:xfrm>
+          <a:off x="0" y="0"/>
+          <a:ext cx="0" cy="0"/>
+          <a:chOff x="0" y="0"/>
+          <a:chExt cx="0" cy="0"/>
+        </a:xfrm>
+      </p:grpSpPr>
       <p:sp>
         <p:nvSpPr>
           <p:cNvPr id="2" name="Rectangle 1"/>
@@ -10567,6 +10795,7 @@
           <a:lstStyle/>
           <a:p>
             <a:pPr algn="ctr"/>
+            <a:endParaRPr/>
           </a:p>
         </p:txBody>
       </p:sp>
@@ -10610,6 +10839,7 @@
           <a:lstStyle/>
           <a:p>
             <a:pPr algn="ctr"/>
+            <a:endParaRPr/>
           </a:p>
         </p:txBody>
       </p:sp>
@@ -10653,6 +10883,7 @@
           <a:lstStyle/>
           <a:p>
             <a:pPr algn="ctr"/>
+            <a:endParaRPr/>
           </a:p>
         </p:txBody>
       </p:sp>
@@ -10833,7 +11064,7 @@
 </file>
 
 <file path=ppt/slides/slide4.xml><?xml version="1.0" encoding="utf-8"?>
-<p:sld xmlns:a="http://schemas.openxmlformats.org/drawingml/2006/main" xmlns:p="http://schemas.openxmlformats.org/presentationml/2006/main" xmlns:r="http://schemas.openxmlformats.org/officeDocument/2006/relationships">
+<p:sld xmlns:a="http://schemas.openxmlformats.org/drawingml/2006/main" xmlns:r="http://schemas.openxmlformats.org/officeDocument/2006/relationships" xmlns:p="http://schemas.openxmlformats.org/presentationml/2006/main">
   <p:cSld>
     <p:bg>
       <p:bgPr>
@@ -10849,7 +11080,14 @@
         <p:cNvGrpSpPr/>
         <p:nvPr/>
       </p:nvGrpSpPr>
-      <p:grpSpPr/>
+      <p:grpSpPr>
+        <a:xfrm>
+          <a:off x="0" y="0"/>
+          <a:ext cx="0" cy="0"/>
+          <a:chOff x="0" y="0"/>
+          <a:chExt cx="0" cy="0"/>
+        </a:xfrm>
+      </p:grpSpPr>
       <p:sp>
         <p:nvSpPr>
           <p:cNvPr id="2" name="Rectangle 1"/>
@@ -10890,6 +11128,7 @@
           <a:lstStyle/>
           <a:p>
             <a:pPr algn="ctr"/>
+            <a:endParaRPr/>
           </a:p>
         </p:txBody>
       </p:sp>
@@ -11070,7 +11309,7 @@
 </file>
 
 <file path=ppt/slides/slide5.xml><?xml version="1.0" encoding="utf-8"?>
-<p:sld xmlns:a="http://schemas.openxmlformats.org/drawingml/2006/main" xmlns:p="http://schemas.openxmlformats.org/presentationml/2006/main" xmlns:r="http://schemas.openxmlformats.org/officeDocument/2006/relationships">
+<p:sld xmlns:a="http://schemas.openxmlformats.org/drawingml/2006/main" xmlns:r="http://schemas.openxmlformats.org/officeDocument/2006/relationships" xmlns:p="http://schemas.openxmlformats.org/presentationml/2006/main">
   <p:cSld>
     <p:bg>
       <p:bgPr>
@@ -11086,7 +11325,14 @@
         <p:cNvGrpSpPr/>
         <p:nvPr/>
       </p:nvGrpSpPr>
-      <p:grpSpPr/>
+      <p:grpSpPr>
+        <a:xfrm>
+          <a:off x="0" y="0"/>
+          <a:ext cx="0" cy="0"/>
+          <a:chOff x="0" y="0"/>
+          <a:chExt cx="0" cy="0"/>
+        </a:xfrm>
+      </p:grpSpPr>
       <p:sp>
         <p:nvSpPr>
           <p:cNvPr id="2" name="Rectangle 1"/>
@@ -11127,6 +11373,7 @@
           <a:lstStyle/>
           <a:p>
             <a:pPr algn="ctr"/>
+            <a:endParaRPr/>
           </a:p>
         </p:txBody>
       </p:sp>
@@ -11343,7 +11590,7 @@
 </file>
 
 <file path=ppt/slides/slide6.xml><?xml version="1.0" encoding="utf-8"?>
-<p:sld xmlns:a="http://schemas.openxmlformats.org/drawingml/2006/main" xmlns:p="http://schemas.openxmlformats.org/presentationml/2006/main" xmlns:r="http://schemas.openxmlformats.org/officeDocument/2006/relationships">
+<p:sld xmlns:a="http://schemas.openxmlformats.org/drawingml/2006/main" xmlns:r="http://schemas.openxmlformats.org/officeDocument/2006/relationships" xmlns:p="http://schemas.openxmlformats.org/presentationml/2006/main">
   <p:cSld>
     <p:bg>
       <p:bgPr>
@@ -11359,7 +11606,14 @@
         <p:cNvGrpSpPr/>
         <p:nvPr/>
       </p:nvGrpSpPr>
-      <p:grpSpPr/>
+      <p:grpSpPr>
+        <a:xfrm>
+          <a:off x="0" y="0"/>
+          <a:ext cx="0" cy="0"/>
+          <a:chOff x="0" y="0"/>
+          <a:chExt cx="0" cy="0"/>
+        </a:xfrm>
+      </p:grpSpPr>
       <p:sp>
         <p:nvSpPr>
           <p:cNvPr id="2" name="Rectangle 1"/>
@@ -11400,6 +11654,7 @@
           <a:lstStyle/>
           <a:p>
             <a:pPr algn="ctr"/>
+            <a:endParaRPr/>
           </a:p>
         </p:txBody>
       </p:sp>
@@ -11616,7 +11871,7 @@
 </file>
 
 <file path=ppt/slides/slide7.xml><?xml version="1.0" encoding="utf-8"?>
-<p:sld xmlns:a="http://schemas.openxmlformats.org/drawingml/2006/main" xmlns:p="http://schemas.openxmlformats.org/presentationml/2006/main" xmlns:r="http://schemas.openxmlformats.org/officeDocument/2006/relationships">
+<p:sld xmlns:a="http://schemas.openxmlformats.org/drawingml/2006/main" xmlns:r="http://schemas.openxmlformats.org/officeDocument/2006/relationships" xmlns:p="http://schemas.openxmlformats.org/presentationml/2006/main">
   <p:cSld>
     <p:bg>
       <p:bgPr>
@@ -11632,7 +11887,14 @@
         <p:cNvGrpSpPr/>
         <p:nvPr/>
       </p:nvGrpSpPr>
-      <p:grpSpPr/>
+      <p:grpSpPr>
+        <a:xfrm>
+          <a:off x="0" y="0"/>
+          <a:ext cx="0" cy="0"/>
+          <a:chOff x="0" y="0"/>
+          <a:chExt cx="0" cy="0"/>
+        </a:xfrm>
+      </p:grpSpPr>
       <p:sp>
         <p:nvSpPr>
           <p:cNvPr id="2" name="Rectangle 1"/>
@@ -11673,6 +11935,7 @@
           <a:lstStyle/>
           <a:p>
             <a:pPr algn="ctr"/>
+            <a:endParaRPr/>
           </a:p>
         </p:txBody>
       </p:sp>
@@ -11853,7 +12116,7 @@
 </file>
 
 <file path=ppt/slides/slide8.xml><?xml version="1.0" encoding="utf-8"?>
-<p:sld xmlns:a="http://schemas.openxmlformats.org/drawingml/2006/main" xmlns:p="http://schemas.openxmlformats.org/presentationml/2006/main" xmlns:r="http://schemas.openxmlformats.org/officeDocument/2006/relationships">
+<p:sld xmlns:a="http://schemas.openxmlformats.org/drawingml/2006/main" xmlns:r="http://schemas.openxmlformats.org/officeDocument/2006/relationships" xmlns:p="http://schemas.openxmlformats.org/presentationml/2006/main">
   <p:cSld>
     <p:bg>
       <p:bgPr>
@@ -11869,7 +12132,14 @@
         <p:cNvGrpSpPr/>
         <p:nvPr/>
       </p:nvGrpSpPr>
-      <p:grpSpPr/>
+      <p:grpSpPr>
+        <a:xfrm>
+          <a:off x="0" y="0"/>
+          <a:ext cx="0" cy="0"/>
+          <a:chOff x="0" y="0"/>
+          <a:chExt cx="0" cy="0"/>
+        </a:xfrm>
+      </p:grpSpPr>
       <p:sp>
         <p:nvSpPr>
           <p:cNvPr id="2" name="Rectangle 1"/>
@@ -11910,6 +12180,7 @@
           <a:lstStyle/>
           <a:p>
             <a:pPr algn="ctr"/>
+            <a:endParaRPr/>
           </a:p>
         </p:txBody>
       </p:sp>
@@ -12126,7 +12397,7 @@
 </file>
 
 <file path=ppt/slides/slide9.xml><?xml version="1.0" encoding="utf-8"?>
-<p:sld xmlns:a="http://schemas.openxmlformats.org/drawingml/2006/main" xmlns:p="http://schemas.openxmlformats.org/presentationml/2006/main" xmlns:r="http://schemas.openxmlformats.org/officeDocument/2006/relationships">
+<p:sld xmlns:a="http://schemas.openxmlformats.org/drawingml/2006/main" xmlns:r="http://schemas.openxmlformats.org/officeDocument/2006/relationships" xmlns:p="http://schemas.openxmlformats.org/presentationml/2006/main">
   <p:cSld>
     <p:bg>
       <p:bgPr>
@@ -12142,7 +12413,14 @@
         <p:cNvGrpSpPr/>
         <p:nvPr/>
       </p:nvGrpSpPr>
-      <p:grpSpPr/>
+      <p:grpSpPr>
+        <a:xfrm>
+          <a:off x="0" y="0"/>
+          <a:ext cx="0" cy="0"/>
+          <a:chOff x="0" y="0"/>
+          <a:chExt cx="0" cy="0"/>
+        </a:xfrm>
+      </p:grpSpPr>
       <p:sp>
         <p:nvSpPr>
           <p:cNvPr id="2" name="Rectangle 1"/>
@@ -12183,6 +12461,7 @@
           <a:lstStyle/>
           <a:p>
             <a:pPr algn="ctr"/>
+            <a:endParaRPr/>
           </a:p>
         </p:txBody>
       </p:sp>
